--- a/Quadro_Aulas_Report_2026-06-12.pptx
+++ b/Quadro_Aulas_Report_2026-06-12.pptx
@@ -1038,7 +1038,7 @@
                   <a:srgbClr val="8FA3C0"/>
                 </a:solidFill>
               </a:rPr>
-              <a:t>12 de Junho de 2026 as 09:26</a:t>
+              <a:t>12 de Junho de 2026 as 15:28</a:t>
             </a:r>
             <a:endParaRPr lang="en-US" sz="700" dirty="0"/>
           </a:p>
@@ -1135,7 +1135,7 @@
                   <a:srgbClr val="FFFFFF"/>
                 </a:solidFill>
               </a:rPr>
-              <a:t>361</a:t>
+              <a:t>370</a:t>
             </a:r>
             <a:endParaRPr lang="en-US" sz="2400" dirty="0"/>
           </a:p>
@@ -1207,7 +1207,7 @@
                   <a:srgbClr val="4ADE80"/>
                 </a:solidFill>
               </a:rPr>
-              <a:t>278</a:t>
+              <a:t>285</a:t>
             </a:r>
             <a:endParaRPr lang="en-US" sz="2400" dirty="0"/>
           </a:p>
@@ -1351,7 +1351,7 @@
                   <a:srgbClr val="F87171"/>
                 </a:solidFill>
               </a:rPr>
-              <a:t>54</a:t>
+              <a:t>56</a:t>
             </a:r>
             <a:endParaRPr lang="en-US" sz="2400" dirty="0"/>
           </a:p>
@@ -1473,7 +1473,7 @@
                   <a:srgbClr val="8FA3C0"/>
                 </a:solidFill>
               </a:rPr>
-              <a:t>77% concluido  .  278 de 361 itens</a:t>
+              <a:t>77% concluido  .  285 de 370 itens</a:t>
             </a:r>
             <a:endParaRPr lang="en-US" sz="700" dirty="0"/>
           </a:p>
@@ -1854,7 +1854,7 @@
                   <a:srgbClr val="222222"/>
                 </a:solidFill>
               </a:rPr>
-              <a:t>A Fazer: 4 . Em progresso: 1 . Finalizados: 64</a:t>
+              <a:t>A Fazer: 4 . Em progresso: 0 . Finalizados: 65</a:t>
             </a:r>
             <a:endParaRPr lang="en-US" sz="750" dirty="0"/>
           </a:p>
@@ -1890,7 +1890,7 @@
                   <a:srgbClr val="222222"/>
                 </a:solidFill>
               </a:rPr>
-              <a:t>Est: 274h . Real: 259.2h . Rem: 7.5h</a:t>
+              <a:t>Est: 274h . Real: 259.7h . Rem: 7h</a:t>
             </a:r>
             <a:endParaRPr lang="en-US" sz="750" dirty="0"/>
           </a:p>
@@ -2016,7 +2016,7 @@
         <p:spPr>
           <a:xfrm>
             <a:off x="2514600" y="1033272"/>
-            <a:ext cx="2049445" cy="50292"/>
+            <a:ext cx="2071482" cy="50292"/>
           </a:xfrm>
           <a:prstGeom prst="rect">
             <a:avLst/>
@@ -2062,7 +2062,7 @@
                   <a:srgbClr val="888888"/>
                 </a:solidFill>
               </a:rPr>
-              <a:t>Subs: 93% · 64 de 69</a:t>
+              <a:t>Subs: 94% · 65 de 69</a:t>
             </a:r>
             <a:endParaRPr lang="en-US" sz="650" dirty="0"/>
           </a:p>
@@ -2299,7 +2299,7 @@
                   <a:srgbClr val="222222"/>
                 </a:solidFill>
               </a:rPr>
-              <a:t>Est: 402h . Real: 471.9h . Rem: 11.5h</a:t>
+              <a:t>Est: 402h . Real: 475.9h . Rem: 11.5h</a:t>
             </a:r>
             <a:endParaRPr lang="en-US" sz="750" dirty="0"/>
           </a:p>
@@ -2507,7 +2507,7 @@
                   <a:srgbClr val="D97706"/>
                 </a:solidFill>
               </a:rPr>
-              <a:t>Projetado: 483.4h (+81.4h / +20%)</a:t>
+              <a:t>Projetado: 487.4h (+85.4h / +21%)</a:t>
             </a:r>
             <a:endParaRPr lang="en-US" sz="800" dirty="0"/>
           </a:p>
@@ -2640,7 +2640,7 @@
                   <a:srgbClr val="DC2626"/>
                 </a:solidFill>
               </a:rPr>
-              <a:t>+3h (+75%)</a:t>
+              <a:t>+5h (+125%)</a:t>
             </a:r>
             <a:endParaRPr lang="en-US" sz="700" dirty="0"/>
           </a:p>
@@ -3286,7 +3286,7 @@
                   <a:srgbClr val="222222"/>
                 </a:solidFill>
               </a:rPr>
-              <a:t>A Fazer: 38 . Em progresso: 4 . Finalizados: 65</a:t>
+              <a:t>A Fazer: 36 . Em progresso: 5 . Finalizados: 66</a:t>
             </a:r>
             <a:endParaRPr lang="en-US" sz="750" dirty="0"/>
           </a:p>
@@ -3322,7 +3322,7 @@
                   <a:srgbClr val="222222"/>
                 </a:solidFill>
               </a:rPr>
-              <a:t>Est: 488.5h . Real: 230.5h . Rem: 151h</a:t>
+              <a:t>Est: 488.5h . Real: 237.5h . Rem: 137h</a:t>
             </a:r>
             <a:endParaRPr lang="en-US" sz="750" dirty="0"/>
           </a:p>
@@ -3448,7 +3448,7 @@
         <p:spPr>
           <a:xfrm>
             <a:off x="9811512" y="1033272"/>
-            <a:ext cx="1344259" cy="50292"/>
+            <a:ext cx="1366296" cy="50292"/>
           </a:xfrm>
           <a:prstGeom prst="rect">
             <a:avLst/>
@@ -3494,7 +3494,7 @@
                   <a:srgbClr val="888888"/>
                 </a:solidFill>
               </a:rPr>
-              <a:t>Subs: 61% · 65 de 107</a:t>
+              <a:t>Subs: 62% · 66 de 107</a:t>
             </a:r>
             <a:endParaRPr lang="en-US" sz="650" dirty="0"/>
           </a:p>
@@ -3530,7 +3530,7 @@
                   <a:srgbClr val="1D9E75"/>
                 </a:solidFill>
               </a:rPr>
-              <a:t>Projetado: 381.5h (-107.0h / -22%)</a:t>
+              <a:t>Projetado: 374.5h (-114.0h / -23%)</a:t>
             </a:r>
             <a:endParaRPr lang="en-US" sz="800" dirty="0"/>
           </a:p>
@@ -3803,7 +3803,7 @@
                   <a:srgbClr val="D97706"/>
                 </a:solidFill>
               </a:rPr>
-              <a:t>1131h</a:t>
+              <a:t>1166.5h</a:t>
             </a:r>
             <a:endParaRPr lang="en-US" sz="2400" dirty="0"/>
           </a:p>
@@ -3936,7 +3936,7 @@
                   <a:srgbClr val="F87171"/>
                 </a:solidFill>
               </a:rPr>
-              <a:t>170h</a:t>
+              <a:t>155.5h</a:t>
             </a:r>
             <a:endParaRPr lang="en-US" sz="2400" dirty="0"/>
           </a:p>
@@ -4069,7 +4069,7 @@
                   <a:srgbClr val="D97706"/>
                 </a:solidFill>
               </a:rPr>
-              <a:t>+90.5h</a:t>
+              <a:t>+111.5h</a:t>
             </a:r>
             <a:endParaRPr lang="en-US" sz="2400" dirty="0"/>
           </a:p>
@@ -4105,7 +4105,7 @@
                   <a:srgbClr val="888888"/>
                 </a:solidFill>
               </a:rPr>
-              <a:t>projetado: 1301h (+7%)</a:t>
+              <a:t>projetado: 1322h (+9%)</a:t>
             </a:r>
             <a:endParaRPr lang="en-US" sz="700" dirty="0"/>
           </a:p>
@@ -4120,7 +4120,7 @@
         <p:spPr>
           <a:xfrm>
             <a:off x="2441448" y="2916936"/>
-            <a:ext cx="8386369" cy="54864"/>
+            <a:ext cx="8512203" cy="54864"/>
           </a:xfrm>
           <a:prstGeom prst="rect">
             <a:avLst/>
@@ -4144,8 +4144,8 @@
         </p:nvSpPr>
         <p:spPr>
           <a:xfrm>
-            <a:off x="10827817" y="2916936"/>
-            <a:ext cx="1260551" cy="54864"/>
+            <a:off x="10953651" y="2916936"/>
+            <a:ext cx="1134717" cy="54864"/>
           </a:xfrm>
           <a:prstGeom prst="rect">
             <a:avLst/>
@@ -4758,7 +4758,7 @@
                   <a:srgbClr val="991B1B"/>
                 </a:solidFill>
               </a:rPr>
-              <a:t>61% concluido</a:t>
+              <a:t>62% concluido</a:t>
             </a:r>
             <a:endParaRPr lang="en-US" sz="650" dirty="0"/>
           </a:p>
@@ -4798,7 +4798,7 @@
         <p:spPr>
           <a:xfrm>
             <a:off x="7420356" y="3291840"/>
-            <a:ext cx="2780553" cy="64008"/>
+            <a:ext cx="2826136" cy="64008"/>
           </a:xfrm>
           <a:prstGeom prst="rect">
             <a:avLst/>
@@ -4905,7 +4905,7 @@
                   <a:srgbClr val="1D9E75"/>
                 </a:solidFill>
               </a:rPr>
-              <a:t>24/06/2026</a:t>
+              <a:t>23/06/2026</a:t>
             </a:r>
             <a:endParaRPr lang="en-US" sz="1050" dirty="0"/>
           </a:p>
@@ -5203,7 +5203,7 @@
                   <a:srgbClr val="D85A30"/>
                 </a:solidFill>
               </a:rPr>
-              <a:t>18.4%</a:t>
+              <a:t>18.1%</a:t>
             </a:r>
             <a:endParaRPr lang="en-US" sz="2200" dirty="0"/>
           </a:p>
@@ -5336,7 +5336,7 @@
                   <a:srgbClr val="534AB7"/>
                 </a:solidFill>
               </a:rPr>
-              <a:t>8.0%</a:t>
+              <a:t>11.8%</a:t>
             </a:r>
             <a:endParaRPr lang="en-US" sz="2200" dirty="0"/>
           </a:p>
@@ -5408,7 +5408,7 @@
                   <a:srgbClr val="888888"/>
                 </a:solidFill>
               </a:rPr>
-              <a:t>16 Sub Bug . 87.3h realizadas</a:t>
+              <a:t>24 Sub Bug . 105.3h realizadas</a:t>
             </a:r>
             <a:endParaRPr lang="en-US" sz="700" dirty="0"/>
           </a:p>
@@ -5469,7 +5469,7 @@
                   <a:srgbClr val="1D9E75"/>
                 </a:solidFill>
               </a:rPr>
-              <a:t>81.6%</a:t>
+              <a:t>81.9%</a:t>
             </a:r>
             <a:endParaRPr lang="en-US" sz="2200" dirty="0"/>
           </a:p>
@@ -5756,7 +5756,7 @@
                   <a:srgbClr val="222222"/>
                 </a:solidFill>
               </a:rPr>
-              <a:t>#404993 +3h(+75%) [artursilva frwk.com.br]</a:t>
+              <a:t>#404993 +5h(+125%) [artursilva frwk.com.br]</a:t>
             </a:r>
             <a:endParaRPr lang="en-US" sz="750" dirty="0"/>
           </a:p>
@@ -5913,7 +5913,7 @@
                   <a:srgbClr val="FFFFFF"/>
                 </a:solidFill>
               </a:rPr>
-              <a:t>~9 dias</a:t>
+              <a:t>~8 dias</a:t>
             </a:r>
             <a:endParaRPr lang="en-US" sz="650" dirty="0"/>
           </a:p>
@@ -5963,7 +5963,7 @@
                   <a:srgbClr val="222222"/>
                 </a:solidFill>
               </a:rPr>
-              <a:t>Observabilidade: Projetado 24/06/2026 · Base 29/05/2026</a:t>
+              <a:t>Observabilidade: Projetado 23/06/2026 · Base 29/05/2026</a:t>
             </a:r>
             <a:endParaRPr lang="en-US" sz="750" dirty="0"/>
           </a:p>
@@ -6120,7 +6120,7 @@
                   <a:srgbClr val="FFFFFF"/>
                 </a:solidFill>
               </a:rPr>
-              <a:t>145.4h</a:t>
+              <a:t>151.4h</a:t>
             </a:r>
             <a:endParaRPr lang="en-US" sz="650" dirty="0"/>
           </a:p>
@@ -6206,7 +6206,7 @@
                   <a:srgbClr val="222222"/>
                 </a:solidFill>
               </a:rPr>
-              <a:t>Horas nao planejadas: 145.4h</a:t>
+              <a:t>Horas nao planejadas: 151.4h</a:t>
             </a:r>
             <a:endParaRPr lang="en-US" sz="750" dirty="0"/>
           </a:p>
@@ -6335,7 +6335,7 @@
                   <a:srgbClr val="FFFFFF"/>
                 </a:solidFill>
               </a:rPr>
-              <a:t>98</a:t>
+              <a:t>107</a:t>
             </a:r>
             <a:endParaRPr lang="en-US" sz="650" dirty="0"/>
           </a:p>
@@ -6385,7 +6385,7 @@
                   <a:srgbClr val="222222"/>
                 </a:solidFill>
               </a:rPr>
-              <a:t>98 itens criados pos 01/05</a:t>
+              <a:t>107 itens criados pos 01/05</a:t>
             </a:r>
             <a:endParaRPr lang="en-US" sz="750" dirty="0"/>
           </a:p>
@@ -6651,7 +6651,7 @@
         <p:spPr>
           <a:xfrm>
             <a:off x="2496312" y="6153912"/>
-            <a:ext cx="1049261" cy="73152"/>
+            <a:ext cx="1080338" cy="73152"/>
           </a:xfrm>
           <a:prstGeom prst="rect">
             <a:avLst/>
@@ -6697,7 +6697,7 @@
                   <a:srgbClr val="1D9E75"/>
                 </a:solidFill>
               </a:rPr>
-              <a:t>185.7h · 39 subs finalizadas</a:t>
+              <a:t>191.2h · 40 subs finalizadas</a:t>
             </a:r>
             <a:endParaRPr lang="en-US" sz="950" dirty="0"/>
           </a:p>
@@ -6887,7 +6887,7 @@
                   <a:srgbClr val="D85A30"/>
                 </a:solidFill>
               </a:rPr>
-              <a:t>275.5h · 45 subs finalizadas</a:t>
+              <a:t>290.5h · 46 subs finalizadas</a:t>
             </a:r>
             <a:endParaRPr lang="en-US" sz="950" dirty="0"/>
           </a:p>
@@ -7267,7 +7267,7 @@
                   <a:srgbClr val="D85A30"/>
                 </a:solidFill>
               </a:rPr>
-              <a:t>74.5h · 18 subs finalizadas</a:t>
+              <a:t>83.5h · 19 subs finalizadas</a:t>
             </a:r>
             <a:endParaRPr lang="en-US" sz="950" dirty="0"/>
           </a:p>
@@ -7303,7 +7303,7 @@
                   <a:srgbClr val="888888"/>
                 </a:solidFill>
               </a:rPr>
-              <a:t>43h estimadas</a:t>
+              <a:t>49h estimadas</a:t>
             </a:r>
             <a:endParaRPr lang="en-US" sz="850" dirty="0"/>
           </a:p>
@@ -7411,7 +7411,7 @@
         <p:spPr>
           <a:xfrm>
             <a:off x="8055864" y="6153912"/>
-            <a:ext cx="847784" cy="73152"/>
+            <a:ext cx="849171" cy="73152"/>
           </a:xfrm>
           <a:prstGeom prst="rect">
             <a:avLst/>
@@ -7457,7 +7457,7 @@
                   <a:srgbClr val="1D9E75"/>
                 </a:solidFill>
               </a:rPr>
-              <a:t>201h · 38 subs finalizadas</a:t>
+              <a:t>207h · 42 subs finalizadas</a:t>
             </a:r>
             <a:endParaRPr lang="en-US" sz="950" dirty="0"/>
           </a:p>
@@ -7493,7 +7493,7 @@
                   <a:srgbClr val="888888"/>
                 </a:solidFill>
               </a:rPr>
-              <a:t>284h estimadas</a:t>
+              <a:t>292h estimadas</a:t>
             </a:r>
             <a:endParaRPr lang="en-US" sz="850" dirty="0"/>
           </a:p>

--- a/Quadro_Aulas_Report_2026-06-12.pptx
+++ b/Quadro_Aulas_Report_2026-06-12.pptx
@@ -1038,7 +1038,7 @@
                   <a:srgbClr val="8FA3C0"/>
                 </a:solidFill>
               </a:rPr>
-              <a:t>12 de Junho de 2026 as 15:28</a:t>
+              <a:t>12 de Junho de 2026 as 17:40</a:t>
             </a:r>
             <a:endParaRPr lang="en-US" sz="700" dirty="0"/>
           </a:p>
@@ -1207,7 +1207,7 @@
                   <a:srgbClr val="4ADE80"/>
                 </a:solidFill>
               </a:rPr>
-              <a:t>285</a:t>
+              <a:t>287</a:t>
             </a:r>
             <a:endParaRPr lang="en-US" sz="2400" dirty="0"/>
           </a:p>
@@ -1351,7 +1351,7 @@
                   <a:srgbClr val="F87171"/>
                 </a:solidFill>
               </a:rPr>
-              <a:t>56</a:t>
+              <a:t>54</a:t>
             </a:r>
             <a:endParaRPr lang="en-US" sz="2400" dirty="0"/>
           </a:p>
@@ -1427,7 +1427,7 @@
         <p:spPr>
           <a:xfrm>
             <a:off x="137160" y="3538728"/>
-            <a:ext cx="1584198" cy="91440"/>
+            <a:ext cx="1604772" cy="91440"/>
           </a:xfrm>
           <a:prstGeom prst="rect">
             <a:avLst/>
@@ -1473,7 +1473,7 @@
                   <a:srgbClr val="8FA3C0"/>
                 </a:solidFill>
               </a:rPr>
-              <a:t>77% concluido  .  285 de 370 itens</a:t>
+              <a:t>78% concluido  .  287 de 370 itens</a:t>
             </a:r>
             <a:endParaRPr lang="en-US" sz="700" dirty="0"/>
           </a:p>
@@ -3803,7 +3803,7 @@
                   <a:srgbClr val="D97706"/>
                 </a:solidFill>
               </a:rPr>
-              <a:t>1166.5h</a:t>
+              <a:t>1168h</a:t>
             </a:r>
             <a:endParaRPr lang="en-US" sz="2400" dirty="0"/>
           </a:p>
@@ -4069,7 +4069,7 @@
                   <a:srgbClr val="D97706"/>
                 </a:solidFill>
               </a:rPr>
-              <a:t>+111.5h</a:t>
+              <a:t>+113h</a:t>
             </a:r>
             <a:endParaRPr lang="en-US" sz="2400" dirty="0"/>
           </a:p>
@@ -4105,7 +4105,7 @@
                   <a:srgbClr val="888888"/>
                 </a:solidFill>
               </a:rPr>
-              <a:t>projetado: 1322h (+9%)</a:t>
+              <a:t>projetado: 1323.5h (+9%)</a:t>
             </a:r>
             <a:endParaRPr lang="en-US" sz="700" dirty="0"/>
           </a:p>
@@ -4120,7 +4120,7 @@
         <p:spPr>
           <a:xfrm>
             <a:off x="2441448" y="2916936"/>
-            <a:ext cx="8512203" cy="54864"/>
+            <a:ext cx="8513489" cy="54864"/>
           </a:xfrm>
           <a:prstGeom prst="rect">
             <a:avLst/>
@@ -4144,8 +4144,8 @@
         </p:nvSpPr>
         <p:spPr>
           <a:xfrm>
-            <a:off x="10953651" y="2916936"/>
-            <a:ext cx="1134717" cy="54864"/>
+            <a:off x="10954937" y="2916936"/>
+            <a:ext cx="1133431" cy="54864"/>
           </a:xfrm>
           <a:prstGeom prst="rect">
             <a:avLst/>
@@ -5408,7 +5408,7 @@
                   <a:srgbClr val="888888"/>
                 </a:solidFill>
               </a:rPr>
-              <a:t>24 Sub Bug . 105.3h realizadas</a:t>
+              <a:t>24 Sub Bug . 106.8h realizadas</a:t>
             </a:r>
             <a:endParaRPr lang="en-US" sz="700" dirty="0"/>
           </a:p>
@@ -7411,7 +7411,7 @@
         <p:spPr>
           <a:xfrm>
             <a:off x="8055864" y="6153912"/>
-            <a:ext cx="849171" cy="73152"/>
+            <a:ext cx="855324" cy="73152"/>
           </a:xfrm>
           <a:prstGeom prst="rect">
             <a:avLst/>
@@ -7457,7 +7457,7 @@
                   <a:srgbClr val="1D9E75"/>
                 </a:solidFill>
               </a:rPr>
-              <a:t>207h · 42 subs finalizadas</a:t>
+              <a:t>208.5h · 44 subs finalizadas</a:t>
             </a:r>
             <a:endParaRPr lang="en-US" sz="950" dirty="0"/>
           </a:p>

--- a/Quadro_Aulas_Report_2026-06-12.pptx
+++ b/Quadro_Aulas_Report_2026-06-12.pptx
@@ -1038,7 +1038,7 @@
                   <a:srgbClr val="8FA3C0"/>
                 </a:solidFill>
               </a:rPr>
-              <a:t>12 de Junho de 2026 as 17:40</a:t>
+              <a:t>12 de Junho de 2026 as 18:11</a:t>
             </a:r>
             <a:endParaRPr lang="en-US" sz="700" dirty="0"/>
           </a:p>
@@ -1207,7 +1207,7 @@
                   <a:srgbClr val="4ADE80"/>
                 </a:solidFill>
               </a:rPr>
-              <a:t>287</a:t>
+              <a:t>288</a:t>
             </a:r>
             <a:endParaRPr lang="en-US" sz="2400" dirty="0"/>
           </a:p>
@@ -1473,7 +1473,7 @@
                   <a:srgbClr val="8FA3C0"/>
                 </a:solidFill>
               </a:rPr>
-              <a:t>78% concluido  .  287 de 370 itens</a:t>
+              <a:t>78% concluido  .  288 de 370 itens</a:t>
             </a:r>
             <a:endParaRPr lang="en-US" sz="700" dirty="0"/>
           </a:p>
@@ -2227,7 +2227,7 @@
                   <a:srgbClr val="222222"/>
                 </a:solidFill>
               </a:rPr>
-              <a:t>7 Stories · 3 NFT · 101 itens</a:t>
+              <a:t>7 Stories · 3 NFT · 104 itens</a:t>
             </a:r>
             <a:endParaRPr lang="en-US" sz="750" dirty="0"/>
           </a:p>
@@ -2263,7 +2263,7 @@
                   <a:srgbClr val="222222"/>
                 </a:solidFill>
               </a:rPr>
-              <a:t>A Fazer: 11 . Em progresso: 1 . Finalizados: 89</a:t>
+              <a:t>A Fazer: 11 . Em progresso: 2 . Finalizados: 91</a:t>
             </a:r>
             <a:endParaRPr lang="en-US" sz="750" dirty="0"/>
           </a:p>
@@ -2299,7 +2299,7 @@
                   <a:srgbClr val="222222"/>
                 </a:solidFill>
               </a:rPr>
-              <a:t>Est: 402h . Real: 475.9h . Rem: 11.5h</a:t>
+              <a:t>Est: 405h . Real: 499.9h . Rem: 11.5h</a:t>
             </a:r>
             <a:endParaRPr lang="en-US" sz="750" dirty="0"/>
           </a:p>
@@ -2339,7 +2339,7 @@
         <p:spPr>
           <a:xfrm>
             <a:off x="4946904" y="859536"/>
-            <a:ext cx="1322222" cy="50292"/>
+            <a:ext cx="1542593" cy="50292"/>
           </a:xfrm>
           <a:prstGeom prst="rect">
             <a:avLst/>
@@ -2385,7 +2385,7 @@
                   <a:srgbClr val="888888"/>
                 </a:solidFill>
               </a:rPr>
-              <a:t>Stories/NFTs: 60% · 6 de 10</a:t>
+              <a:t>Stories/NFTs: 70% · 7 de 10</a:t>
             </a:r>
             <a:endParaRPr lang="en-US" sz="650" dirty="0"/>
           </a:p>
@@ -2471,7 +2471,7 @@
                   <a:srgbClr val="888888"/>
                 </a:solidFill>
               </a:rPr>
-              <a:t>Subs: 88% · 89 de 101</a:t>
+              <a:t>Subs: 88% · 91 de 104</a:t>
             </a:r>
             <a:endParaRPr lang="en-US" sz="650" dirty="0"/>
           </a:p>
@@ -2504,10 +2504,10 @@
             <a:r>
               <a:rPr lang="en-US" sz="800" b="1" dirty="0">
                 <a:solidFill>
-                  <a:srgbClr val="D97706"/>
-                </a:solidFill>
-              </a:rPr>
-              <a:t>Projetado: 487.4h (+85.4h / +21%)</a:t>
+                  <a:srgbClr val="DC2626"/>
+                </a:solidFill>
+              </a:rPr>
+              <a:t>Projetado: 511.4h (+106.4h / +26%)</a:t>
             </a:r>
             <a:endParaRPr lang="en-US" sz="800" dirty="0"/>
           </a:p>
@@ -2543,7 +2543,7 @@
                   <a:srgbClr val="534AB7"/>
                 </a:solidFill>
               </a:rPr>
-              <a:t>1 ativo(s) com horas estouradas</a:t>
+              <a:t>2 ativo(s) com horas estouradas</a:t>
             </a:r>
             <a:endParaRPr lang="en-US" sz="750" dirty="0"/>
           </a:p>
@@ -3250,7 +3250,7 @@
                   <a:srgbClr val="222222"/>
                 </a:solidFill>
               </a:rPr>
-              <a:t>17 Stories · 107 itens</a:t>
+              <a:t>17 Stories · 115 itens</a:t>
             </a:r>
             <a:endParaRPr lang="en-US" sz="750" dirty="0"/>
           </a:p>
@@ -3286,7 +3286,7 @@
                   <a:srgbClr val="222222"/>
                 </a:solidFill>
               </a:rPr>
-              <a:t>A Fazer: 36 . Em progresso: 5 . Finalizados: 66</a:t>
+              <a:t>A Fazer: 38 . Em progresso: 5 . Finalizados: 72</a:t>
             </a:r>
             <a:endParaRPr lang="en-US" sz="750" dirty="0"/>
           </a:p>
@@ -3322,7 +3322,7 @@
                   <a:srgbClr val="222222"/>
                 </a:solidFill>
               </a:rPr>
-              <a:t>Est: 488.5h . Real: 237.5h . Rem: 137h</a:t>
+              <a:t>Est: 488.5h . Real: 245h . Rem: 137h</a:t>
             </a:r>
             <a:endParaRPr lang="en-US" sz="750" dirty="0"/>
           </a:p>
@@ -3448,7 +3448,7 @@
         <p:spPr>
           <a:xfrm>
             <a:off x="9811512" y="1033272"/>
-            <a:ext cx="1366296" cy="50292"/>
+            <a:ext cx="1388334" cy="50292"/>
           </a:xfrm>
           <a:prstGeom prst="rect">
             <a:avLst/>
@@ -3494,7 +3494,7 @@
                   <a:srgbClr val="888888"/>
                 </a:solidFill>
               </a:rPr>
-              <a:t>Subs: 62% · 66 de 107</a:t>
+              <a:t>Subs: 63% · 72 de 115</a:t>
             </a:r>
             <a:endParaRPr lang="en-US" sz="650" dirty="0"/>
           </a:p>
@@ -3530,7 +3530,7 @@
                   <a:srgbClr val="1D9E75"/>
                 </a:solidFill>
               </a:rPr>
-              <a:t>Projetado: 374.5h (-114.0h / -23%)</a:t>
+              <a:t>Projetado: 382h (-106.5h / -22%)</a:t>
             </a:r>
             <a:endParaRPr lang="en-US" sz="800" dirty="0"/>
           </a:p>
@@ -4758,7 +4758,7 @@
                   <a:srgbClr val="991B1B"/>
                 </a:solidFill>
               </a:rPr>
-              <a:t>62% concluido</a:t>
+              <a:t>63% concluido</a:t>
             </a:r>
             <a:endParaRPr lang="en-US" sz="650" dirty="0"/>
           </a:p>
@@ -4798,7 +4798,7 @@
         <p:spPr>
           <a:xfrm>
             <a:off x="7420356" y="3291840"/>
-            <a:ext cx="2826136" cy="64008"/>
+            <a:ext cx="2871719" cy="64008"/>
           </a:xfrm>
           <a:prstGeom prst="rect">
             <a:avLst/>
@@ -5706,7 +5706,7 @@
                   <a:srgbClr val="FFFFFF"/>
                 </a:solidFill>
               </a:rPr>
-              <a:t>1</a:t>
+              <a:t>2</a:t>
             </a:r>
             <a:endParaRPr lang="en-US" sz="650" dirty="0"/>
           </a:p>
@@ -5786,6 +5786,14 @@
             <a:pPr algn="l" indent="0" marL="0">
               <a:buNone/>
             </a:pPr>
+            <a:r>
+              <a:rPr lang="en-US" sz="750" dirty="0">
+                <a:solidFill>
+                  <a:srgbClr val="222222"/>
+                </a:solidFill>
+              </a:rPr>
+              <a:t>#407538 +2h(+67%) [CARLOS HENRIQUE ALMEIDA OLIVEIRA]</a:t>
+            </a:r>
             <a:endParaRPr lang="en-US" sz="750" dirty="0"/>
           </a:p>
         </p:txBody>
@@ -6421,7 +6429,7 @@
                   <a:srgbClr val="222222"/>
                 </a:solidFill>
               </a:rPr>
-              <a:t>Princ +55h · Redund +138h · Obs +9h</a:t>
+              <a:t>Princ +55h · Redund +141h · Obs +9h</a:t>
             </a:r>
             <a:endParaRPr lang="en-US" sz="750" dirty="0"/>
           </a:p>

--- a/Quadro_Aulas_Report_2026-06-12.pptx
+++ b/Quadro_Aulas_Report_2026-06-12.pptx
@@ -1038,7 +1038,7 @@
                   <a:srgbClr val="8FA3C0"/>
                 </a:solidFill>
               </a:rPr>
-              <a:t>12 de Junho de 2026 as 18:11</a:t>
+              <a:t>12 de Junho de 2026 as 19:46</a:t>
             </a:r>
             <a:endParaRPr lang="en-US" sz="700" dirty="0"/>
           </a:p>
@@ -1207,7 +1207,7 @@
                   <a:srgbClr val="4ADE80"/>
                 </a:solidFill>
               </a:rPr>
-              <a:t>288</a:t>
+              <a:t>289</a:t>
             </a:r>
             <a:endParaRPr lang="en-US" sz="2400" dirty="0"/>
           </a:p>
@@ -1279,7 +1279,7 @@
                   <a:srgbClr val="FCD34D"/>
                 </a:solidFill>
               </a:rPr>
-              <a:t>18</a:t>
+              <a:t>10</a:t>
             </a:r>
             <a:endParaRPr lang="en-US" sz="2400" dirty="0"/>
           </a:p>
@@ -1351,7 +1351,7 @@
                   <a:srgbClr val="F87171"/>
                 </a:solidFill>
               </a:rPr>
-              <a:t>54</a:t>
+              <a:t>53</a:t>
             </a:r>
             <a:endParaRPr lang="en-US" sz="2400" dirty="0"/>
           </a:p>
@@ -1473,7 +1473,7 @@
                   <a:srgbClr val="8FA3C0"/>
                 </a:solidFill>
               </a:rPr>
-              <a:t>78% concluido  .  288 de 370 itens</a:t>
+              <a:t>78% concluido  .  289 de 370 itens</a:t>
             </a:r>
             <a:endParaRPr lang="en-US" sz="700" dirty="0"/>
           </a:p>
@@ -3286,7 +3286,7 @@
                   <a:srgbClr val="222222"/>
                 </a:solidFill>
               </a:rPr>
-              <a:t>A Fazer: 38 . Em progresso: 5 . Finalizados: 72</a:t>
+              <a:t>A Fazer: 37 . Em progresso: 5 . Finalizados: 73</a:t>
             </a:r>
             <a:endParaRPr lang="en-US" sz="750" dirty="0"/>
           </a:p>
@@ -3322,7 +3322,7 @@
                   <a:srgbClr val="222222"/>
                 </a:solidFill>
               </a:rPr>
-              <a:t>Est: 488.5h . Real: 245h . Rem: 137h</a:t>
+              <a:t>Est: 488.5h . Real: 248h . Rem: 129h</a:t>
             </a:r>
             <a:endParaRPr lang="en-US" sz="750" dirty="0"/>
           </a:p>
@@ -3494,7 +3494,7 @@
                   <a:srgbClr val="888888"/>
                 </a:solidFill>
               </a:rPr>
-              <a:t>Subs: 63% · 72 de 115</a:t>
+              <a:t>Subs: 63% · 73 de 115</a:t>
             </a:r>
             <a:endParaRPr lang="en-US" sz="650" dirty="0"/>
           </a:p>
@@ -3530,7 +3530,7 @@
                   <a:srgbClr val="1D9E75"/>
                 </a:solidFill>
               </a:rPr>
-              <a:t>Projetado: 382h (-106.5h / -22%)</a:t>
+              <a:t>Projetado: 377h (-111.5h / -23%)</a:t>
             </a:r>
             <a:endParaRPr lang="en-US" sz="800" dirty="0"/>
           </a:p>
@@ -3803,7 +3803,7 @@
                   <a:srgbClr val="D97706"/>
                 </a:solidFill>
               </a:rPr>
-              <a:t>1168h</a:t>
+              <a:t>1171h</a:t>
             </a:r>
             <a:endParaRPr lang="en-US" sz="2400" dirty="0"/>
           </a:p>
@@ -3936,7 +3936,7 @@
                   <a:srgbClr val="F87171"/>
                 </a:solidFill>
               </a:rPr>
-              <a:t>155.5h</a:t>
+              <a:t>147.5h</a:t>
             </a:r>
             <a:endParaRPr lang="en-US" sz="2400" dirty="0"/>
           </a:p>
@@ -4069,7 +4069,7 @@
                   <a:srgbClr val="D97706"/>
                 </a:solidFill>
               </a:rPr>
-              <a:t>+113h</a:t>
+              <a:t>+108h</a:t>
             </a:r>
             <a:endParaRPr lang="en-US" sz="2400" dirty="0"/>
           </a:p>
@@ -4105,7 +4105,7 @@
                   <a:srgbClr val="888888"/>
                 </a:solidFill>
               </a:rPr>
-              <a:t>projetado: 1323.5h (+9%)</a:t>
+              <a:t>projetado: 1318.5h (+9%)</a:t>
             </a:r>
             <a:endParaRPr lang="en-US" sz="700" dirty="0"/>
           </a:p>
@@ -4120,7 +4120,7 @@
         <p:spPr>
           <a:xfrm>
             <a:off x="2441448" y="2916936"/>
-            <a:ext cx="8513489" cy="54864"/>
+            <a:ext cx="8567723" cy="54864"/>
           </a:xfrm>
           <a:prstGeom prst="rect">
             <a:avLst/>
@@ -4144,8 +4144,8 @@
         </p:nvSpPr>
         <p:spPr>
           <a:xfrm>
-            <a:off x="10954937" y="2916936"/>
-            <a:ext cx="1133431" cy="54864"/>
+            <a:off x="11009171" y="2916936"/>
+            <a:ext cx="1079197" cy="54864"/>
           </a:xfrm>
           <a:prstGeom prst="rect">
             <a:avLst/>
@@ -5203,7 +5203,7 @@
                   <a:srgbClr val="D85A30"/>
                 </a:solidFill>
               </a:rPr>
-              <a:t>18.1%</a:t>
+              <a:t>18.0%</a:t>
             </a:r>
             <a:endParaRPr lang="en-US" sz="2200" dirty="0"/>
           </a:p>
@@ -5336,7 +5336,7 @@
                   <a:srgbClr val="534AB7"/>
                 </a:solidFill>
               </a:rPr>
-              <a:t>11.8%</a:t>
+              <a:t>11.7%</a:t>
             </a:r>
             <a:endParaRPr lang="en-US" sz="2200" dirty="0"/>
           </a:p>
@@ -5469,7 +5469,7 @@
                   <a:srgbClr val="1D9E75"/>
                 </a:solidFill>
               </a:rPr>
-              <a:t>81.9%</a:t>
+              <a:t>82.0%</a:t>
             </a:r>
             <a:endParaRPr lang="en-US" sz="2200" dirty="0"/>
           </a:p>
@@ -7419,7 +7419,7 @@
         <p:spPr>
           <a:xfrm>
             <a:off x="8055864" y="6153912"/>
-            <a:ext cx="855324" cy="73152"/>
+            <a:ext cx="844494" cy="73152"/>
           </a:xfrm>
           <a:prstGeom prst="rect">
             <a:avLst/>
@@ -7465,7 +7465,7 @@
                   <a:srgbClr val="1D9E75"/>
                 </a:solidFill>
               </a:rPr>
-              <a:t>208.5h · 44 subs finalizadas</a:t>
+              <a:t>211.5h · 45 subs finalizadas</a:t>
             </a:r>
             <a:endParaRPr lang="en-US" sz="950" dirty="0"/>
           </a:p>
@@ -7501,7 +7501,7 @@
                   <a:srgbClr val="888888"/>
                 </a:solidFill>
               </a:rPr>
-              <a:t>292h estimadas</a:t>
+              <a:t>300h estimadas</a:t>
             </a:r>
             <a:endParaRPr lang="en-US" sz="850" dirty="0"/>
           </a:p>
